--- a/plugins/gradient-cio/assets/examples/gradient-odd-manager-monitor-triage.pptx
+++ b/plugins/gradient-cio/assets/examples/gradient-odd-manager-monitor-triage.pptx
@@ -3375,7 +3375,7 @@
         <p:spPr>
           <a:xfrm>
             <a:off x="640080" y="1325880"/>
-            <a:ext cx="10908792" cy="2263816"/>
+            <a:ext cx="10908792" cy="2187032"/>
           </a:xfrm>
           <a:prstGeom prst="rect">
             <a:avLst/>
@@ -3424,7 +3424,7 @@
         <p:spPr>
           <a:xfrm>
             <a:off x="640080" y="1325880"/>
-            <a:ext cx="54864" cy="2263816"/>
+            <a:ext cx="54864" cy="2187032"/>
           </a:xfrm>
           <a:prstGeom prst="rect">
             <a:avLst/>
@@ -3515,7 +3515,7 @@
         <p:spPr>
           <a:xfrm>
             <a:off x="804671" y="1719072"/>
-            <a:ext cx="10616184" cy="1779184"/>
+            <a:ext cx="10616184" cy="1702400"/>
           </a:xfrm>
           <a:prstGeom prst="rect">
             <a:avLst/>
@@ -3556,7 +3556,7 @@
         </p:nvSpPr>
         <p:spPr>
           <a:xfrm>
-            <a:off x="640080" y="3699424"/>
+            <a:off x="640080" y="3622640"/>
             <a:ext cx="10908792" cy="201168"/>
           </a:xfrm>
           <a:prstGeom prst="rect">
@@ -3599,8 +3599,8 @@
           <p:nvPr/>
         </p:nvGraphicFramePr>
         <p:xfrm>
-          <a:off x="640080" y="3973744"/>
-          <a:ext cx="10908792" cy="2244175"/>
+          <a:off x="640080" y="3896960"/>
+          <a:ext cx="10908792" cy="2320959"/>
         </p:xfrm>
         <a:graphic>
           <a:graphicData uri="http://schemas.openxmlformats.org/drawingml/2006/table">
@@ -3615,7 +3615,7 @@
                 <a:gridCol w="2224278"/>
                 <a:gridCol w="2224278"/>
               </a:tblGrid>
-              <a:tr h="1122087">
+              <a:tr h="1160479">
                 <a:tc>
                   <a:txBody>
                     <a:bodyPr/>
@@ -3752,7 +3752,7 @@
                   </a:tcPr>
                 </a:tc>
               </a:tr>
-              <a:tr h="1122088">
+              <a:tr h="1160480">
                 <a:tc>
                   <a:txBody>
                     <a:bodyPr/>
@@ -5483,7 +5483,7 @@
         </p:nvGraphicFramePr>
         <p:xfrm>
           <a:off x="640080" y="1325880"/>
-          <a:ext cx="10908792" cy="2533486"/>
+          <a:ext cx="10908792" cy="3062055"/>
         </p:xfrm>
         <a:graphic>
           <a:graphicData uri="http://schemas.openxmlformats.org/drawingml/2006/table">
@@ -5502,7 +5502,7 @@
                 <a:gridCol w="1112139"/>
                 <a:gridCol w="1112139"/>
               </a:tblGrid>
-              <a:tr h="1266743">
+              <a:tr h="1531027">
                 <a:tc>
                   <a:txBody>
                     <a:bodyPr/>
@@ -5747,7 +5747,7 @@
                   </a:tcPr>
                 </a:tc>
               </a:tr>
-              <a:tr h="1266743">
+              <a:tr h="1531028">
                 <a:tc>
                   <a:txBody>
                     <a:bodyPr/>
@@ -6004,8 +6004,8 @@
         </p:nvSpPr>
         <p:spPr>
           <a:xfrm>
-            <a:off x="640080" y="3969094"/>
-            <a:ext cx="10908792" cy="2248825"/>
+            <a:off x="640080" y="4497663"/>
+            <a:ext cx="10908792" cy="1720256"/>
           </a:xfrm>
           <a:prstGeom prst="rect">
             <a:avLst/>

--- a/plugins/gradient-cio/assets/examples/gradient-odd-manager-monitor-triage.pptx
+++ b/plugins/gradient-cio/assets/examples/gradient-odd-manager-monitor-triage.pptx
@@ -2614,307 +2614,6 @@
         </p:nvSpPr>
         <p:spPr>
           <a:xfrm>
-            <a:off x="5852160" y="4315968"/>
-            <a:ext cx="4709160" cy="182880"/>
-          </a:xfrm>
-          <a:prstGeom prst="rect">
-            <a:avLst/>
-          </a:prstGeom>
-          <a:noFill/>
-        </p:spPr>
-        <p:txBody>
-          <a:bodyPr wrap="none" lIns="9144" rIns="9144" tIns="9144" bIns="9144" anchor="t">
-            <a:spAutoFit/>
-          </a:bodyPr>
-          <a:lstStyle/>
-          <a:p>
-            <a:pPr algn="l">
-              <a:spcAft>
-                <a:spcPts val="0"/>
-              </a:spcAft>
-              <a:defRPr sz="700" b="1">
-                <a:solidFill>
-                  <a:srgbClr val="8A94A1"/>
-                </a:solidFill>
-                <a:latin typeface="Inter"/>
-              </a:defRPr>
-            </a:pPr>
-            <a:r>
-              <a:rPr>
-                <a:latin typeface="Inter"/>
-              </a:rPr>
-              <a:t>FLAGGED FOR FOLLOW-UP</a:t>
-            </a:r>
-          </a:p>
-        </p:txBody>
-      </p:sp>
-      <p:sp>
-        <p:nvSpPr>
-          <p:cNvPr id="12" name="TextBox 11"/>
-          <p:cNvSpPr txBox="1"/>
-          <p:nvPr/>
-        </p:nvSpPr>
-        <p:spPr>
-          <a:xfrm>
-            <a:off x="5852160" y="4507992"/>
-            <a:ext cx="4709160" cy="310896"/>
-          </a:xfrm>
-          <a:prstGeom prst="rect">
-            <a:avLst/>
-          </a:prstGeom>
-          <a:noFill/>
-        </p:spPr>
-        <p:txBody>
-          <a:bodyPr wrap="none" lIns="9144" rIns="9144" tIns="9144" bIns="9144" anchor="t">
-            <a:spAutoFit/>
-          </a:bodyPr>
-          <a:lstStyle/>
-          <a:p>
-            <a:pPr algn="l">
-              <a:spcAft>
-                <a:spcPts val="0"/>
-              </a:spcAft>
-              <a:defRPr sz="1000" b="1">
-                <a:solidFill>
-                  <a:srgbClr val="FFFFFF"/>
-                </a:solidFill>
-                <a:latin typeface="Inter"/>
-              </a:defRPr>
-            </a:pPr>
-            <a:r>
-              <a:rPr>
-                <a:latin typeface="Inter"/>
-              </a:rPr>
-              <a:t>1</a:t>
-            </a:r>
-          </a:p>
-        </p:txBody>
-      </p:sp>
-      <p:sp>
-        <p:nvSpPr>
-          <p:cNvPr id="13" name="Rectangle 12"/>
-          <p:cNvSpPr/>
-          <p:nvPr/>
-        </p:nvSpPr>
-        <p:spPr>
-          <a:xfrm>
-            <a:off x="685800" y="5687568"/>
-            <a:ext cx="3337560" cy="530352"/>
-          </a:xfrm>
-          <a:prstGeom prst="rect">
-            <a:avLst/>
-          </a:prstGeom>
-          <a:solidFill>
-            <a:srgbClr val="F2A93B"/>
-          </a:solidFill>
-          <a:ln>
-            <a:solidFill>
-              <a:srgbClr val="F2A93B"/>
-            </a:solidFill>
-          </a:ln>
-        </p:spPr>
-        <p:style>
-          <a:lnRef idx="1">
-            <a:schemeClr val="accent1"/>
-          </a:lnRef>
-          <a:fillRef idx="3">
-            <a:schemeClr val="accent1"/>
-          </a:fillRef>
-          <a:effectRef idx="2">
-            <a:schemeClr val="accent1"/>
-          </a:effectRef>
-          <a:fontRef idx="minor">
-            <a:schemeClr val="lt1"/>
-          </a:fontRef>
-        </p:style>
-        <p:txBody>
-          <a:bodyPr rtlCol="0" anchor="ctr"/>
-          <a:lstStyle/>
-          <a:p>
-            <a:pPr algn="ctr">
-              <a:defRPr>
-                <a:latin typeface="Inter"/>
-              </a:defRPr>
-            </a:pPr>
-          </a:p>
-        </p:txBody>
-      </p:sp>
-      <p:sp>
-        <p:nvSpPr>
-          <p:cNvPr id="14" name="TextBox 13"/>
-          <p:cNvSpPr txBox="1"/>
-          <p:nvPr/>
-        </p:nvSpPr>
-        <p:spPr>
-          <a:xfrm>
-            <a:off x="822960" y="5760720"/>
-            <a:ext cx="3063240" cy="128016"/>
-          </a:xfrm>
-          <a:prstGeom prst="rect">
-            <a:avLst/>
-          </a:prstGeom>
-          <a:noFill/>
-        </p:spPr>
-        <p:txBody>
-          <a:bodyPr wrap="none" lIns="9144" rIns="9144" tIns="9144" bIns="9144" anchor="t">
-            <a:spAutoFit/>
-          </a:bodyPr>
-          <a:lstStyle/>
-          <a:p>
-            <a:pPr algn="l">
-              <a:spcAft>
-                <a:spcPts val="0"/>
-              </a:spcAft>
-              <a:defRPr sz="620" b="1">
-                <a:solidFill>
-                  <a:srgbClr val="0D1117"/>
-                </a:solidFill>
-                <a:latin typeface="Inter"/>
-              </a:defRPr>
-            </a:pPr>
-            <a:r>
-              <a:rPr>
-                <a:latin typeface="Inter"/>
-              </a:rPr>
-              <a:t>OVERALL VIEW</a:t>
-            </a:r>
-          </a:p>
-        </p:txBody>
-      </p:sp>
-      <p:sp>
-        <p:nvSpPr>
-          <p:cNvPr id="15" name="TextBox 14"/>
-          <p:cNvSpPr txBox="1"/>
-          <p:nvPr/>
-        </p:nvSpPr>
-        <p:spPr>
-          <a:xfrm>
-            <a:off x="822960" y="5916168"/>
-            <a:ext cx="3063240" cy="182880"/>
-          </a:xfrm>
-          <a:prstGeom prst="rect">
-            <a:avLst/>
-          </a:prstGeom>
-          <a:noFill/>
-        </p:spPr>
-        <p:txBody>
-          <a:bodyPr wrap="none" lIns="9144" rIns="9144" tIns="9144" bIns="9144" anchor="t">
-            <a:spAutoFit/>
-          </a:bodyPr>
-          <a:lstStyle/>
-          <a:p>
-            <a:pPr algn="l">
-              <a:spcAft>
-                <a:spcPts val="0"/>
-              </a:spcAft>
-              <a:defRPr sz="900" b="1">
-                <a:solidFill>
-                  <a:srgbClr val="0D1117"/>
-                </a:solidFill>
-                <a:latin typeface="Inter"/>
-              </a:defRPr>
-            </a:pPr>
-            <a:r>
-              <a:rPr>
-                <a:latin typeface="Inter"/>
-              </a:rPr>
-              <a:t>One subject needs follow-up</a:t>
-            </a:r>
-          </a:p>
-        </p:txBody>
-      </p:sp>
-      <p:sp>
-        <p:nvSpPr>
-          <p:cNvPr id="16" name="TextBox 15"/>
-          <p:cNvSpPr txBox="1"/>
-          <p:nvPr/>
-        </p:nvSpPr>
-        <p:spPr>
-          <a:xfrm>
-            <a:off x="4297680" y="5733288"/>
-            <a:ext cx="3108960" cy="164592"/>
-          </a:xfrm>
-          <a:prstGeom prst="rect">
-            <a:avLst/>
-          </a:prstGeom>
-          <a:noFill/>
-        </p:spPr>
-        <p:txBody>
-          <a:bodyPr wrap="none" lIns="9144" rIns="9144" tIns="9144" bIns="9144" anchor="t">
-            <a:spAutoFit/>
-          </a:bodyPr>
-          <a:lstStyle/>
-          <a:p>
-            <a:pPr algn="l">
-              <a:spcAft>
-                <a:spcPts val="0"/>
-              </a:spcAft>
-              <a:defRPr sz="650" b="1">
-                <a:solidFill>
-                  <a:srgbClr val="8A94A1"/>
-                </a:solidFill>
-                <a:latin typeface="Inter"/>
-              </a:defRPr>
-            </a:pPr>
-            <a:r>
-              <a:rPr>
-                <a:latin typeface="Inter"/>
-              </a:rPr>
-              <a:t>SCOPE REVIEWED</a:t>
-            </a:r>
-          </a:p>
-        </p:txBody>
-      </p:sp>
-      <p:sp>
-        <p:nvSpPr>
-          <p:cNvPr id="17" name="TextBox 16"/>
-          <p:cNvSpPr txBox="1"/>
-          <p:nvPr/>
-        </p:nvSpPr>
-        <p:spPr>
-          <a:xfrm>
-            <a:off x="4297680" y="5934456"/>
-            <a:ext cx="3108960" cy="201168"/>
-          </a:xfrm>
-          <a:prstGeom prst="rect">
-            <a:avLst/>
-          </a:prstGeom>
-          <a:noFill/>
-        </p:spPr>
-        <p:txBody>
-          <a:bodyPr wrap="none" lIns="9144" rIns="9144" tIns="9144" bIns="9144" anchor="t">
-            <a:spAutoFit/>
-          </a:bodyPr>
-          <a:lstStyle/>
-          <a:p>
-            <a:pPr algn="l">
-              <a:spcAft>
-                <a:spcPts val="0"/>
-              </a:spcAft>
-              <a:defRPr sz="800" b="1">
-                <a:solidFill>
-                  <a:srgbClr val="FFFFFF"/>
-                </a:solidFill>
-                <a:latin typeface="Inter"/>
-              </a:defRPr>
-            </a:pPr>
-            <a:r>
-              <a:rPr>
-                <a:latin typeface="Inter"/>
-              </a:rPr>
-              <a:t>2 of 2 · Complete</a:t>
-            </a:r>
-          </a:p>
-        </p:txBody>
-      </p:sp>
-      <p:sp>
-        <p:nvSpPr>
-          <p:cNvPr id="18" name="TextBox 17"/>
-          <p:cNvSpPr txBox="1"/>
-          <p:nvPr/>
-        </p:nvSpPr>
-        <p:spPr>
-          <a:xfrm>
             <a:off x="685800" y="6400800"/>
             <a:ext cx="8046720" cy="146304"/>
           </a:xfrm>
@@ -2951,7 +2650,7 @@
       </p:sp>
       <p:sp>
         <p:nvSpPr>
-          <p:cNvPr id="19" name="TextBox 18"/>
+          <p:cNvPr id="12" name="TextBox 11"/>
           <p:cNvSpPr txBox="1"/>
           <p:nvPr/>
         </p:nvSpPr>
@@ -2993,7 +2692,7 @@
       </p:sp>
       <p:sp>
         <p:nvSpPr>
-          <p:cNvPr id="20" name="TextBox 19"/>
+          <p:cNvPr id="13" name="TextBox 12"/>
           <p:cNvSpPr txBox="1"/>
           <p:nvPr/>
         </p:nvSpPr>
@@ -3109,7 +2808,7 @@
         <p:spPr>
           <a:xfrm>
             <a:off x="640080" y="329184"/>
-            <a:ext cx="5303520" cy="182880"/>
+            <a:ext cx="9875520" cy="182880"/>
           </a:xfrm>
           <a:prstGeom prst="rect">
             <a:avLst/>
@@ -3150,48 +2849,6 @@
         </p:nvSpPr>
         <p:spPr>
           <a:xfrm>
-            <a:off x="5897880" y="310896"/>
-            <a:ext cx="4800600" cy="256032"/>
-          </a:xfrm>
-          <a:prstGeom prst="rect">
-            <a:avLst/>
-          </a:prstGeom>
-          <a:noFill/>
-        </p:spPr>
-        <p:txBody>
-          <a:bodyPr wrap="none" lIns="9144" rIns="9144" tIns="9144" bIns="9144" anchor="t">
-            <a:spAutoFit/>
-          </a:bodyPr>
-          <a:lstStyle/>
-          <a:p>
-            <a:pPr algn="r">
-              <a:spcAft>
-                <a:spcPts val="0"/>
-              </a:spcAft>
-              <a:defRPr sz="680" b="1">
-                <a:solidFill>
-                  <a:srgbClr val="4F6B00"/>
-                </a:solidFill>
-                <a:latin typeface="Inter"/>
-              </a:defRPr>
-            </a:pPr>
-            <a:r>
-              <a:rPr>
-                <a:latin typeface="Inter"/>
-              </a:rPr>
-              <a:t>Illustrative, Gradient Maintained — demo data, not the client's holdings or managers</a:t>
-            </a:r>
-          </a:p>
-        </p:txBody>
-      </p:sp>
-      <p:sp>
-        <p:nvSpPr>
-          <p:cNvPr id="5" name="TextBox 4"/>
-          <p:cNvSpPr txBox="1"/>
-          <p:nvPr/>
-        </p:nvSpPr>
-        <p:spPr>
-          <a:xfrm>
             <a:off x="640080" y="566928"/>
             <a:ext cx="10058400" cy="530352"/>
           </a:xfrm>
@@ -3228,7 +2885,7 @@
       </p:sp>
       <p:sp>
         <p:nvSpPr>
-          <p:cNvPr id="6" name="Rectangle 5"/>
+          <p:cNvPr id="5" name="Rectangle 4"/>
           <p:cNvSpPr/>
           <p:nvPr/>
         </p:nvSpPr>
@@ -3277,7 +2934,7 @@
       </p:sp>
       <p:sp>
         <p:nvSpPr>
-          <p:cNvPr id="7" name="Rectangle 6"/>
+          <p:cNvPr id="6" name="Rectangle 5"/>
           <p:cNvSpPr/>
           <p:nvPr/>
         </p:nvSpPr>
@@ -3326,7 +2983,7 @@
       </p:sp>
       <p:sp>
         <p:nvSpPr>
-          <p:cNvPr id="8" name="TextBox 7"/>
+          <p:cNvPr id="7" name="TextBox 6"/>
           <p:cNvSpPr txBox="1"/>
           <p:nvPr/>
         </p:nvSpPr>
@@ -3368,24 +3025,24 @@
       </p:sp>
       <p:sp>
         <p:nvSpPr>
-          <p:cNvPr id="9" name="Rectangle 8"/>
+          <p:cNvPr id="8" name="Rectangle 7"/>
           <p:cNvSpPr/>
           <p:nvPr/>
         </p:nvSpPr>
         <p:spPr>
           <a:xfrm>
-            <a:off x="640080" y="1325880"/>
-            <a:ext cx="10908792" cy="2187032"/>
+            <a:off x="640080" y="1399032"/>
+            <a:ext cx="73152" cy="1385690"/>
           </a:xfrm>
           <a:prstGeom prst="rect">
             <a:avLst/>
           </a:prstGeom>
           <a:solidFill>
-            <a:srgbClr val="F5F7F9"/>
+            <a:srgbClr val="F2A93B"/>
           </a:solidFill>
           <a:ln>
             <a:solidFill>
-              <a:srgbClr val="E3E7EC"/>
+              <a:srgbClr val="F2A93B"/>
             </a:solidFill>
           </a:ln>
         </p:spPr>
@@ -3417,24 +3074,66 @@
       </p:sp>
       <p:sp>
         <p:nvSpPr>
+          <p:cNvPr id="9" name="TextBox 8"/>
+          <p:cNvSpPr txBox="1"/>
+          <p:nvPr/>
+        </p:nvSpPr>
+        <p:spPr>
+          <a:xfrm>
+            <a:off x="896112" y="1371600"/>
+            <a:ext cx="10588752" cy="888556"/>
+          </a:xfrm>
+          <a:prstGeom prst="rect">
+            <a:avLst/>
+          </a:prstGeom>
+          <a:noFill/>
+        </p:spPr>
+        <p:txBody>
+          <a:bodyPr wrap="none" lIns="9144" rIns="9144" tIns="9144" bIns="9144" anchor="t">
+            <a:spAutoFit/>
+          </a:bodyPr>
+          <a:lstStyle/>
+          <a:p>
+            <a:pPr algn="l">
+              <a:spcAft>
+                <a:spcPts val="0"/>
+              </a:spcAft>
+              <a:defRPr sz="1800" b="1">
+                <a:solidFill>
+                  <a:srgbClr val="0D1117"/>
+                </a:solidFill>
+                <a:latin typeface="Inter"/>
+              </a:defRPr>
+            </a:pPr>
+            <a:r>
+              <a:rPr>
+                <a:latin typeface="Inter"/>
+              </a:rPr>
+              <a:t>One subject needs follow-up</a:t>
+            </a:r>
+          </a:p>
+        </p:txBody>
+      </p:sp>
+      <p:sp>
+        <p:nvSpPr>
           <p:cNvPr id="10" name="Rectangle 9"/>
           <p:cNvSpPr/>
           <p:nvPr/>
         </p:nvSpPr>
         <p:spPr>
           <a:xfrm>
-            <a:off x="640080" y="1325880"/>
-            <a:ext cx="54864" cy="2187032"/>
+            <a:off x="640080" y="2967602"/>
+            <a:ext cx="10908792" cy="1436245"/>
           </a:xfrm>
           <a:prstGeom prst="rect">
             <a:avLst/>
           </a:prstGeom>
           <a:solidFill>
-            <a:srgbClr val="0D1117"/>
+            <a:srgbClr val="F5F7F9"/>
           </a:solidFill>
           <a:ln>
             <a:solidFill>
-              <a:srgbClr val="0D1117"/>
+              <a:srgbClr val="E3E7EC"/>
             </a:solidFill>
           </a:ln>
         </p:spPr>
@@ -3466,13 +3165,62 @@
       </p:sp>
       <p:sp>
         <p:nvSpPr>
-          <p:cNvPr id="11" name="TextBox 10"/>
+          <p:cNvPr id="11" name="Rectangle 10"/>
+          <p:cNvSpPr/>
+          <p:nvPr/>
+        </p:nvSpPr>
+        <p:spPr>
+          <a:xfrm>
+            <a:off x="640080" y="2967602"/>
+            <a:ext cx="54864" cy="1436245"/>
+          </a:xfrm>
+          <a:prstGeom prst="rect">
+            <a:avLst/>
+          </a:prstGeom>
+          <a:solidFill>
+            <a:srgbClr val="0D1117"/>
+          </a:solidFill>
+          <a:ln>
+            <a:solidFill>
+              <a:srgbClr val="0D1117"/>
+            </a:solidFill>
+          </a:ln>
+        </p:spPr>
+        <p:style>
+          <a:lnRef idx="1">
+            <a:schemeClr val="accent1"/>
+          </a:lnRef>
+          <a:fillRef idx="3">
+            <a:schemeClr val="accent1"/>
+          </a:fillRef>
+          <a:effectRef idx="2">
+            <a:schemeClr val="accent1"/>
+          </a:effectRef>
+          <a:fontRef idx="minor">
+            <a:schemeClr val="lt1"/>
+          </a:fontRef>
+        </p:style>
+        <p:txBody>
+          <a:bodyPr rtlCol="0" anchor="ctr"/>
+          <a:lstStyle/>
+          <a:p>
+            <a:pPr algn="ctr">
+              <a:defRPr>
+                <a:latin typeface="Inter"/>
+              </a:defRPr>
+            </a:pPr>
+          </a:p>
+        </p:txBody>
+      </p:sp>
+      <p:sp>
+        <p:nvSpPr>
+          <p:cNvPr id="12" name="TextBox 11"/>
           <p:cNvSpPr txBox="1"/>
           <p:nvPr/>
         </p:nvSpPr>
         <p:spPr>
           <a:xfrm>
-            <a:off x="804671" y="1435607"/>
+            <a:off x="804671" y="3077330"/>
             <a:ext cx="10616184" cy="228600"/>
           </a:xfrm>
           <a:prstGeom prst="rect">
@@ -3508,14 +3256,14 @@
       </p:sp>
       <p:sp>
         <p:nvSpPr>
-          <p:cNvPr id="12" name="TextBox 11"/>
+          <p:cNvPr id="13" name="TextBox 12"/>
           <p:cNvSpPr txBox="1"/>
           <p:nvPr/>
         </p:nvSpPr>
         <p:spPr>
           <a:xfrm>
-            <a:off x="804671" y="1719072"/>
-            <a:ext cx="10616184" cy="1702400"/>
+            <a:off x="804671" y="3360794"/>
+            <a:ext cx="10616184" cy="951613"/>
           </a:xfrm>
           <a:prstGeom prst="rect">
             <a:avLst/>
@@ -3550,13 +3298,13 @@
       </p:sp>
       <p:sp>
         <p:nvSpPr>
-          <p:cNvPr id="13" name="TextBox 12"/>
+          <p:cNvPr id="14" name="TextBox 13"/>
           <p:cNvSpPr txBox="1"/>
           <p:nvPr/>
         </p:nvSpPr>
         <p:spPr>
           <a:xfrm>
-            <a:off x="640080" y="3622640"/>
+            <a:off x="640080" y="4513575"/>
             <a:ext cx="10908792" cy="201168"/>
           </a:xfrm>
           <a:prstGeom prst="rect">
@@ -3592,15 +3340,15 @@
       </p:sp>
       <p:graphicFrame>
         <p:nvGraphicFramePr>
-          <p:cNvPr id="14" name="Table 13"/>
+          <p:cNvPr id="15" name="Table 14"/>
           <p:cNvGraphicFramePr>
             <a:graphicFrameLocks noGrp="1"/>
           </p:cNvGraphicFramePr>
           <p:nvPr/>
         </p:nvGraphicFramePr>
         <p:xfrm>
-          <a:off x="640080" y="3896960"/>
-          <a:ext cx="10908792" cy="2320959"/>
+          <a:off x="640080" y="4787895"/>
+          <a:ext cx="10908792" cy="1430024"/>
         </p:xfrm>
         <a:graphic>
           <a:graphicData uri="http://schemas.openxmlformats.org/drawingml/2006/table">
@@ -3615,7 +3363,7 @@
                 <a:gridCol w="2224278"/>
                 <a:gridCol w="2224278"/>
               </a:tblGrid>
-              <a:tr h="1160479">
+              <a:tr h="715012">
                 <a:tc>
                   <a:txBody>
                     <a:bodyPr/>
@@ -3752,7 +3500,7 @@
                   </a:tcPr>
                 </a:tc>
               </a:tr>
-              <a:tr h="1160480">
+              <a:tr h="715012">
                 <a:tc>
                   <a:txBody>
                     <a:bodyPr/>
@@ -3895,7 +3643,7 @@
       </p:graphicFrame>
       <p:sp>
         <p:nvSpPr>
-          <p:cNvPr id="15" name="Rectangle 14"/>
+          <p:cNvPr id="16" name="Rectangle 15"/>
           <p:cNvSpPr/>
           <p:nvPr/>
         </p:nvSpPr>
@@ -3944,7 +3692,7 @@
       </p:sp>
       <p:sp>
         <p:nvSpPr>
-          <p:cNvPr id="16" name="TextBox 15"/>
+          <p:cNvPr id="17" name="TextBox 16"/>
           <p:cNvSpPr txBox="1"/>
           <p:nvPr/>
         </p:nvSpPr>
@@ -3986,7 +3734,7 @@
       </p:sp>
       <p:sp>
         <p:nvSpPr>
-          <p:cNvPr id="17" name="TextBox 16"/>
+          <p:cNvPr id="18" name="TextBox 17"/>
           <p:cNvSpPr txBox="1"/>
           <p:nvPr/>
         </p:nvSpPr>
@@ -4028,7 +3776,7 @@
       </p:sp>
       <p:sp>
         <p:nvSpPr>
-          <p:cNvPr id="18" name="TextBox 17"/>
+          <p:cNvPr id="19" name="TextBox 18"/>
           <p:cNvSpPr txBox="1"/>
           <p:nvPr/>
         </p:nvSpPr>
@@ -4144,7 +3892,7 @@
         <p:spPr>
           <a:xfrm>
             <a:off x="640080" y="329184"/>
-            <a:ext cx="5303520" cy="182880"/>
+            <a:ext cx="9875520" cy="182880"/>
           </a:xfrm>
           <a:prstGeom prst="rect">
             <a:avLst/>
@@ -4185,48 +3933,6 @@
         </p:nvSpPr>
         <p:spPr>
           <a:xfrm>
-            <a:off x="5897880" y="310896"/>
-            <a:ext cx="4800600" cy="256032"/>
-          </a:xfrm>
-          <a:prstGeom prst="rect">
-            <a:avLst/>
-          </a:prstGeom>
-          <a:noFill/>
-        </p:spPr>
-        <p:txBody>
-          <a:bodyPr wrap="none" lIns="9144" rIns="9144" tIns="9144" bIns="9144" anchor="t">
-            <a:spAutoFit/>
-          </a:bodyPr>
-          <a:lstStyle/>
-          <a:p>
-            <a:pPr algn="r">
-              <a:spcAft>
-                <a:spcPts val="0"/>
-              </a:spcAft>
-              <a:defRPr sz="680" b="1">
-                <a:solidFill>
-                  <a:srgbClr val="4F6B00"/>
-                </a:solidFill>
-                <a:latin typeface="Inter"/>
-              </a:defRPr>
-            </a:pPr>
-            <a:r>
-              <a:rPr>
-                <a:latin typeface="Inter"/>
-              </a:rPr>
-              <a:t>Illustrative, Gradient Maintained — demo data, not the client's holdings or managers</a:t>
-            </a:r>
-          </a:p>
-        </p:txBody>
-      </p:sp>
-      <p:sp>
-        <p:nvSpPr>
-          <p:cNvPr id="5" name="TextBox 4"/>
-          <p:cNvSpPr txBox="1"/>
-          <p:nvPr/>
-        </p:nvSpPr>
-        <p:spPr>
-          <a:xfrm>
             <a:off x="640080" y="566928"/>
             <a:ext cx="10058400" cy="530352"/>
           </a:xfrm>
@@ -4263,7 +3969,7 @@
       </p:sp>
       <p:sp>
         <p:nvSpPr>
-          <p:cNvPr id="6" name="Rectangle 5"/>
+          <p:cNvPr id="5" name="Rectangle 4"/>
           <p:cNvSpPr/>
           <p:nvPr/>
         </p:nvSpPr>
@@ -4312,7 +4018,7 @@
       </p:sp>
       <p:sp>
         <p:nvSpPr>
-          <p:cNvPr id="7" name="Rectangle 6"/>
+          <p:cNvPr id="6" name="Rectangle 5"/>
           <p:cNvSpPr/>
           <p:nvPr/>
         </p:nvSpPr>
@@ -4361,7 +4067,7 @@
       </p:sp>
       <p:sp>
         <p:nvSpPr>
-          <p:cNvPr id="8" name="TextBox 7"/>
+          <p:cNvPr id="7" name="TextBox 6"/>
           <p:cNvSpPr txBox="1"/>
           <p:nvPr/>
         </p:nvSpPr>
@@ -4403,7 +4109,7 @@
       </p:sp>
       <p:sp>
         <p:nvSpPr>
-          <p:cNvPr id="9" name="TextBox 8"/>
+          <p:cNvPr id="8" name="TextBox 7"/>
           <p:cNvSpPr txBox="1"/>
           <p:nvPr/>
         </p:nvSpPr>
@@ -4445,7 +4151,7 @@
       </p:sp>
       <p:graphicFrame>
         <p:nvGraphicFramePr>
-          <p:cNvPr id="10" name="Table 9"/>
+          <p:cNvPr id="9" name="Table 8"/>
           <p:cNvGraphicFramePr>
             <a:graphicFrameLocks noGrp="1"/>
           </p:cNvGraphicFramePr>
@@ -4967,7 +4673,7 @@
       </p:graphicFrame>
       <p:sp>
         <p:nvSpPr>
-          <p:cNvPr id="11" name="Rectangle 10"/>
+          <p:cNvPr id="10" name="Rectangle 9"/>
           <p:cNvSpPr/>
           <p:nvPr/>
         </p:nvSpPr>
@@ -5016,7 +4722,7 @@
       </p:sp>
       <p:sp>
         <p:nvSpPr>
-          <p:cNvPr id="12" name="TextBox 11"/>
+          <p:cNvPr id="11" name="TextBox 10"/>
           <p:cNvSpPr txBox="1"/>
           <p:nvPr/>
         </p:nvSpPr>
@@ -5058,7 +4764,7 @@
       </p:sp>
       <p:sp>
         <p:nvSpPr>
-          <p:cNvPr id="13" name="TextBox 12"/>
+          <p:cNvPr id="12" name="TextBox 11"/>
           <p:cNvSpPr txBox="1"/>
           <p:nvPr/>
         </p:nvSpPr>
@@ -5100,7 +4806,7 @@
       </p:sp>
       <p:sp>
         <p:nvSpPr>
-          <p:cNvPr id="14" name="TextBox 13"/>
+          <p:cNvPr id="13" name="TextBox 12"/>
           <p:cNvSpPr txBox="1"/>
           <p:nvPr/>
         </p:nvSpPr>
@@ -5216,7 +4922,7 @@
         <p:spPr>
           <a:xfrm>
             <a:off x="640080" y="329184"/>
-            <a:ext cx="5303520" cy="182880"/>
+            <a:ext cx="9875520" cy="182880"/>
           </a:xfrm>
           <a:prstGeom prst="rect">
             <a:avLst/>
@@ -5257,48 +4963,6 @@
         </p:nvSpPr>
         <p:spPr>
           <a:xfrm>
-            <a:off x="5897880" y="310896"/>
-            <a:ext cx="4800600" cy="256032"/>
-          </a:xfrm>
-          <a:prstGeom prst="rect">
-            <a:avLst/>
-          </a:prstGeom>
-          <a:noFill/>
-        </p:spPr>
-        <p:txBody>
-          <a:bodyPr wrap="none" lIns="9144" rIns="9144" tIns="9144" bIns="9144" anchor="t">
-            <a:spAutoFit/>
-          </a:bodyPr>
-          <a:lstStyle/>
-          <a:p>
-            <a:pPr algn="r">
-              <a:spcAft>
-                <a:spcPts val="0"/>
-              </a:spcAft>
-              <a:defRPr sz="680" b="1">
-                <a:solidFill>
-                  <a:srgbClr val="4F6B00"/>
-                </a:solidFill>
-                <a:latin typeface="Inter"/>
-              </a:defRPr>
-            </a:pPr>
-            <a:r>
-              <a:rPr>
-                <a:latin typeface="Inter"/>
-              </a:rPr>
-              <a:t>Illustrative, Gradient Maintained — demo data, not the client's holdings or managers</a:t>
-            </a:r>
-          </a:p>
-        </p:txBody>
-      </p:sp>
-      <p:sp>
-        <p:nvSpPr>
-          <p:cNvPr id="5" name="TextBox 4"/>
-          <p:cNvSpPr txBox="1"/>
-          <p:nvPr/>
-        </p:nvSpPr>
-        <p:spPr>
-          <a:xfrm>
             <a:off x="640080" y="566928"/>
             <a:ext cx="10058400" cy="530352"/>
           </a:xfrm>
@@ -5335,7 +4999,7 @@
       </p:sp>
       <p:sp>
         <p:nvSpPr>
-          <p:cNvPr id="6" name="Rectangle 5"/>
+          <p:cNvPr id="5" name="Rectangle 4"/>
           <p:cNvSpPr/>
           <p:nvPr/>
         </p:nvSpPr>
@@ -5384,7 +5048,7 @@
       </p:sp>
       <p:sp>
         <p:nvSpPr>
-          <p:cNvPr id="7" name="Rectangle 6"/>
+          <p:cNvPr id="6" name="Rectangle 5"/>
           <p:cNvSpPr/>
           <p:nvPr/>
         </p:nvSpPr>
@@ -5433,7 +5097,7 @@
       </p:sp>
       <p:sp>
         <p:nvSpPr>
-          <p:cNvPr id="8" name="TextBox 7"/>
+          <p:cNvPr id="7" name="TextBox 6"/>
           <p:cNvSpPr txBox="1"/>
           <p:nvPr/>
         </p:nvSpPr>
@@ -5475,7 +5139,7 @@
       </p:sp>
       <p:graphicFrame>
         <p:nvGraphicFramePr>
-          <p:cNvPr id="9" name="Table 8"/>
+          <p:cNvPr id="8" name="Table 7"/>
           <p:cNvGraphicFramePr>
             <a:graphicFrameLocks noGrp="1"/>
           </p:cNvGraphicFramePr>
@@ -5483,7 +5147,7 @@
         </p:nvGraphicFramePr>
         <p:xfrm>
           <a:off x="640080" y="1325880"/>
-          <a:ext cx="10908792" cy="3062055"/>
+          <a:ext cx="10908792" cy="1823947"/>
         </p:xfrm>
         <a:graphic>
           <a:graphicData uri="http://schemas.openxmlformats.org/drawingml/2006/table">
@@ -5493,16 +5157,12 @@
               </a:tblPr>
               <a:tblGrid>
                 <a:gridCol w="2011680"/>
-                <a:gridCol w="1112139"/>
-                <a:gridCol w="1112139"/>
-                <a:gridCol w="1112139"/>
-                <a:gridCol w="1112139"/>
-                <a:gridCol w="1112139"/>
-                <a:gridCol w="1112139"/>
-                <a:gridCol w="1112139"/>
-                <a:gridCol w="1112139"/>
+                <a:gridCol w="2224278"/>
+                <a:gridCol w="2224278"/>
+                <a:gridCol w="2224278"/>
+                <a:gridCol w="2224278"/>
               </a:tblGrid>
-              <a:tr h="1531027">
+              <a:tr h="911973">
                 <a:tc>
                   <a:txBody>
                     <a:bodyPr/>
@@ -5574,7 +5234,7 @@
                         <a:rPr>
                           <a:latin typeface="Inter"/>
                         </a:rPr>
-                        <a:t>Basis</a:t>
+                        <a:t>Source</a:t>
                       </a:r>
                     </a:p>
                   </a:txBody>
@@ -5601,7 +5261,270 @@
                         <a:rPr>
                           <a:latin typeface="Inter"/>
                         </a:rPr>
-                        <a:t>Tool / view</a:t>
+                        <a:t>As of</a:t>
+                      </a:r>
+                    </a:p>
+                  </a:txBody>
+                  <a:tcPr marL="54864" marR="54864" marT="27432" marB="27432" anchor="ctr">
+                    <a:solidFill>
+                      <a:srgbClr val="0D1117"/>
+                    </a:solidFill>
+                  </a:tcPr>
+                </a:tc>
+                <a:tc>
+                  <a:txBody>
+                    <a:bodyPr/>
+                    <a:lstStyle/>
+                    <a:p>
+                      <a:pPr>
+                        <a:defRPr sz="750" b="1">
+                          <a:solidFill>
+                            <a:srgbClr val="FFFFFF"/>
+                          </a:solidFill>
+                          <a:latin typeface="Inter"/>
+                        </a:defRPr>
+                      </a:pPr>
+                      <a:r>
+                        <a:rPr>
+                          <a:latin typeface="Inter"/>
+                        </a:rPr>
+                        <a:t>Check</a:t>
+                      </a:r>
+                    </a:p>
+                  </a:txBody>
+                  <a:tcPr marL="54864" marR="54864" marT="27432" marB="27432" anchor="ctr">
+                    <a:solidFill>
+                      <a:srgbClr val="0D1117"/>
+                    </a:solidFill>
+                  </a:tcPr>
+                </a:tc>
+              </a:tr>
+              <a:tr h="911974">
+                <a:tc>
+                  <a:txBody>
+                    <a:bodyPr/>
+                    <a:lstStyle/>
+                    <a:p>
+                      <a:pPr>
+                        <a:defRPr sz="720" b="1">
+                          <a:solidFill>
+                            <a:srgbClr val="0D1117"/>
+                          </a:solidFill>
+                          <a:latin typeface="Inter"/>
+                        </a:defRPr>
+                      </a:pPr>
+                      <a:r>
+                        <a:rPr>
+                          <a:latin typeface="Inter"/>
+                        </a:rPr>
+                        <a:t>S1</a:t>
+                      </a:r>
+                    </a:p>
+                  </a:txBody>
+                  <a:tcPr marL="54864" marR="54864" marT="27432" marB="27432" anchor="ctr">
+                    <a:solidFill>
+                      <a:srgbClr val="FFFFFF"/>
+                    </a:solidFill>
+                  </a:tcPr>
+                </a:tc>
+                <a:tc>
+                  <a:txBody>
+                    <a:bodyPr/>
+                    <a:lstStyle/>
+                    <a:p>
+                      <a:pPr>
+                        <a:defRPr sz="720" b="0">
+                          <a:solidFill>
+                            <a:srgbClr val="0D1117"/>
+                          </a:solidFill>
+                          <a:latin typeface="Inter"/>
+                        </a:defRPr>
+                      </a:pPr>
+                      <a:r>
+                        <a:rPr>
+                          <a:latin typeface="Inter"/>
+                        </a:rPr>
+                        <a:t>Roster monitoring and attention queue</a:t>
+                      </a:r>
+                    </a:p>
+                  </a:txBody>
+                  <a:tcPr marL="54864" marR="54864" marT="27432" marB="27432" anchor="ctr">
+                    <a:solidFill>
+                      <a:srgbClr val="FFFFFF"/>
+                    </a:solidFill>
+                  </a:tcPr>
+                </a:tc>
+                <a:tc>
+                  <a:txBody>
+                    <a:bodyPr/>
+                    <a:lstStyle/>
+                    <a:p>
+                      <a:pPr>
+                        <a:defRPr sz="720" b="0">
+                          <a:solidFill>
+                            <a:srgbClr val="0D1117"/>
+                          </a:solidFill>
+                          <a:latin typeface="Inter"/>
+                        </a:defRPr>
+                      </a:pPr>
+                      <a:r>
+                        <a:rPr>
+                          <a:latin typeface="Inter"/>
+                        </a:rPr>
+                        <a:t>get_manager_diligence_attention_queue</a:t>
+                      </a:r>
+                    </a:p>
+                  </a:txBody>
+                  <a:tcPr marL="54864" marR="54864" marT="27432" marB="27432" anchor="ctr">
+                    <a:solidFill>
+                      <a:srgbClr val="FFFFFF"/>
+                    </a:solidFill>
+                  </a:tcPr>
+                </a:tc>
+                <a:tc>
+                  <a:txBody>
+                    <a:bodyPr/>
+                    <a:lstStyle/>
+                    <a:p>
+                      <a:pPr>
+                        <a:defRPr sz="720" b="0">
+                          <a:solidFill>
+                            <a:srgbClr val="0D1117"/>
+                          </a:solidFill>
+                          <a:latin typeface="Inter"/>
+                        </a:defRPr>
+                      </a:pPr>
+                      <a:r>
+                        <a:rPr>
+                          <a:latin typeface="Inter"/>
+                        </a:rPr>
+                        <a:t>2026-10-01</a:t>
+                      </a:r>
+                    </a:p>
+                  </a:txBody>
+                  <a:tcPr marL="54864" marR="54864" marT="27432" marB="27432" anchor="ctr">
+                    <a:solidFill>
+                      <a:srgbClr val="FFFFFF"/>
+                    </a:solidFill>
+                  </a:tcPr>
+                </a:tc>
+                <a:tc>
+                  <a:txBody>
+                    <a:bodyPr/>
+                    <a:lstStyle/>
+                    <a:p>
+                      <a:pPr>
+                        <a:defRPr sz="720" b="1">
+                          <a:solidFill>
+                            <a:srgbClr val="C6F432"/>
+                          </a:solidFill>
+                          <a:latin typeface="Inter"/>
+                        </a:defRPr>
+                      </a:pPr>
+                      <a:r>
+                        <a:rPr>
+                          <a:latin typeface="Inter"/>
+                        </a:rPr>
+                        <a:t>● Passed</a:t>
+                      </a:r>
+                    </a:p>
+                  </a:txBody>
+                  <a:tcPr marL="54864" marR="54864" marT="27432" marB="27432" anchor="ctr">
+                    <a:solidFill>
+                      <a:srgbClr val="F5F7F9"/>
+                    </a:solidFill>
+                  </a:tcPr>
+                </a:tc>
+              </a:tr>
+            </a:tbl>
+          </a:graphicData>
+        </a:graphic>
+      </p:graphicFrame>
+      <p:sp>
+        <p:nvSpPr>
+          <p:cNvPr id="9" name="TextBox 8"/>
+          <p:cNvSpPr txBox="1"/>
+          <p:nvPr/>
+        </p:nvSpPr>
+        <p:spPr>
+          <a:xfrm>
+            <a:off x="640080" y="3259555"/>
+            <a:ext cx="10908792" cy="201168"/>
+          </a:xfrm>
+          <a:prstGeom prst="rect">
+            <a:avLst/>
+          </a:prstGeom>
+          <a:noFill/>
+        </p:spPr>
+        <p:txBody>
+          <a:bodyPr wrap="none" lIns="9144" rIns="9144" tIns="9144" bIns="9144" anchor="t">
+            <a:spAutoFit/>
+          </a:bodyPr>
+          <a:lstStyle/>
+          <a:p>
+            <a:pPr algn="l">
+              <a:spcAft>
+                <a:spcPts val="0"/>
+              </a:spcAft>
+              <a:defRPr sz="720" b="1">
+                <a:solidFill>
+                  <a:srgbClr val="4A5563"/>
+                </a:solidFill>
+                <a:latin typeface="Inter"/>
+              </a:defRPr>
+            </a:pPr>
+            <a:r>
+              <a:rPr>
+                <a:latin typeface="Inter"/>
+              </a:rPr>
+              <a:t>SOURCE AUDIT TRAIL</a:t>
+            </a:r>
+          </a:p>
+        </p:txBody>
+      </p:sp>
+      <p:graphicFrame>
+        <p:nvGraphicFramePr>
+          <p:cNvPr id="10" name="Table 9"/>
+          <p:cNvGraphicFramePr>
+            <a:graphicFrameLocks noGrp="1"/>
+          </p:cNvGraphicFramePr>
+          <p:nvPr/>
+        </p:nvGraphicFramePr>
+        <p:xfrm>
+          <a:off x="640080" y="3533875"/>
+          <a:ext cx="10908792" cy="1348459"/>
+        </p:xfrm>
+        <a:graphic>
+          <a:graphicData uri="http://schemas.openxmlformats.org/drawingml/2006/table">
+            <a:tbl>
+              <a:tblPr firstRow="1" bandRow="1">
+                <a:tableStyleId>{5C22544A-7EE6-4342-B048-85BDC9FD1C3A}</a:tableStyleId>
+              </a:tblPr>
+              <a:tblGrid>
+                <a:gridCol w="2011680"/>
+                <a:gridCol w="2965704"/>
+                <a:gridCol w="2965704"/>
+                <a:gridCol w="2965704"/>
+              </a:tblGrid>
+              <a:tr h="674229">
+                <a:tc>
+                  <a:txBody>
+                    <a:bodyPr/>
+                    <a:lstStyle/>
+                    <a:p>
+                      <a:pPr>
+                        <a:defRPr sz="750" b="1">
+                          <a:solidFill>
+                            <a:srgbClr val="FFFFFF"/>
+                          </a:solidFill>
+                          <a:latin typeface="Inter"/>
+                        </a:defRPr>
+                      </a:pPr>
+                      <a:r>
+                        <a:rPr>
+                          <a:latin typeface="Inter"/>
+                        </a:rPr>
+                        <a:t>Tag</a:t>
                       </a:r>
                     </a:p>
                   </a:txBody>
@@ -5655,33 +5578,6 @@
                         <a:rPr>
                           <a:latin typeface="Inter"/>
                         </a:rPr>
-                        <a:t>As of</a:t>
-                      </a:r>
-                    </a:p>
-                  </a:txBody>
-                  <a:tcPr marL="54864" marR="54864" marT="27432" marB="27432" anchor="ctr">
-                    <a:solidFill>
-                      <a:srgbClr val="0D1117"/>
-                    </a:solidFill>
-                  </a:tcPr>
-                </a:tc>
-                <a:tc>
-                  <a:txBody>
-                    <a:bodyPr/>
-                    <a:lstStyle/>
-                    <a:p>
-                      <a:pPr>
-                        <a:defRPr sz="750" b="1">
-                          <a:solidFill>
-                            <a:srgbClr val="FFFFFF"/>
-                          </a:solidFill>
-                          <a:latin typeface="Inter"/>
-                        </a:defRPr>
-                      </a:pPr>
-                      <a:r>
-                        <a:rPr>
-                          <a:latin typeface="Inter"/>
-                        </a:rPr>
                         <a:t>Data scope</a:t>
                       </a:r>
                     </a:p>
@@ -5709,33 +5605,6 @@
                         <a:rPr>
                           <a:latin typeface="Inter"/>
                         </a:rPr>
-                        <a:t>Validation</a:t>
-                      </a:r>
-                    </a:p>
-                  </a:txBody>
-                  <a:tcPr marL="54864" marR="54864" marT="27432" marB="27432" anchor="ctr">
-                    <a:solidFill>
-                      <a:srgbClr val="0D1117"/>
-                    </a:solidFill>
-                  </a:tcPr>
-                </a:tc>
-                <a:tc>
-                  <a:txBody>
-                    <a:bodyPr/>
-                    <a:lstStyle/>
-                    <a:p>
-                      <a:pPr>
-                        <a:defRPr sz="750" b="1">
-                          <a:solidFill>
-                            <a:srgbClr val="FFFFFF"/>
-                          </a:solidFill>
-                          <a:latin typeface="Inter"/>
-                        </a:defRPr>
-                      </a:pPr>
-                      <a:r>
-                        <a:rPr>
-                          <a:latin typeface="Inter"/>
-                        </a:rPr>
                         <a:t>Digest</a:t>
                       </a:r>
                     </a:p>
@@ -5747,14 +5616,14 @@
                   </a:tcPr>
                 </a:tc>
               </a:tr>
-              <a:tr h="1531028">
+              <a:tr h="674230">
                 <a:tc>
                   <a:txBody>
                     <a:bodyPr/>
                     <a:lstStyle/>
                     <a:p>
                       <a:pPr>
-                        <a:defRPr sz="650" b="1">
+                        <a:defRPr sz="800" b="1">
                           <a:solidFill>
                             <a:srgbClr val="0D1117"/>
                           </a:solidFill>
@@ -5781,88 +5650,7 @@
                     <a:lstStyle/>
                     <a:p>
                       <a:pPr>
-                        <a:defRPr sz="650" b="0">
-                          <a:solidFill>
-                            <a:srgbClr val="0D1117"/>
-                          </a:solidFill>
-                          <a:latin typeface="Inter"/>
-                        </a:defRPr>
-                      </a:pPr>
-                      <a:r>
-                        <a:rPr>
-                          <a:latin typeface="Inter"/>
-                        </a:rPr>
-                        <a:t>Roster monitoring and attention queue</a:t>
-                      </a:r>
-                    </a:p>
-                  </a:txBody>
-                  <a:tcPr marL="54864" marR="54864" marT="27432" marB="27432" anchor="ctr">
-                    <a:solidFill>
-                      <a:srgbClr val="FFFFFF"/>
-                    </a:solidFill>
-                  </a:tcPr>
-                </a:tc>
-                <a:tc>
-                  <a:txBody>
-                    <a:bodyPr/>
-                    <a:lstStyle/>
-                    <a:p>
-                      <a:pPr>
-                        <a:defRPr sz="650" b="0">
-                          <a:solidFill>
-                            <a:srgbClr val="0D1117"/>
-                          </a:solidFill>
-                          <a:latin typeface="Inter"/>
-                        </a:defRPr>
-                      </a:pPr>
-                      <a:r>
-                        <a:rPr>
-                          <a:latin typeface="Inter"/>
-                        </a:rPr>
-                        <a:t>gradient_tool</a:t>
-                      </a:r>
-                    </a:p>
-                  </a:txBody>
-                  <a:tcPr marL="54864" marR="54864" marT="27432" marB="27432" anchor="ctr">
-                    <a:solidFill>
-                      <a:srgbClr val="FFFFFF"/>
-                    </a:solidFill>
-                  </a:tcPr>
-                </a:tc>
-                <a:tc>
-                  <a:txBody>
-                    <a:bodyPr/>
-                    <a:lstStyle/>
-                    <a:p>
-                      <a:pPr>
-                        <a:defRPr sz="650" b="0">
-                          <a:solidFill>
-                            <a:srgbClr val="0D1117"/>
-                          </a:solidFill>
-                          <a:latin typeface="Inter"/>
-                        </a:defRPr>
-                      </a:pPr>
-                      <a:r>
-                        <a:rPr>
-                          <a:latin typeface="Inter"/>
-                        </a:rPr>
-                        <a:t>get_manager_diligence_attention_queue</a:t>
-                      </a:r>
-                    </a:p>
-                  </a:txBody>
-                  <a:tcPr marL="54864" marR="54864" marT="27432" marB="27432" anchor="ctr">
-                    <a:solidFill>
-                      <a:srgbClr val="FFFFFF"/>
-                    </a:solidFill>
-                  </a:tcPr>
-                </a:tc>
-                <a:tc>
-                  <a:txBody>
-                    <a:bodyPr/>
-                    <a:lstStyle/>
-                    <a:p>
-                      <a:pPr>
-                        <a:defRPr sz="650" b="0">
+                        <a:defRPr sz="800" b="0">
                           <a:solidFill>
                             <a:srgbClr val="0D1117"/>
                           </a:solidFill>
@@ -5889,34 +5677,7 @@
                     <a:lstStyle/>
                     <a:p>
                       <a:pPr>
-                        <a:defRPr sz="650" b="0">
-                          <a:solidFill>
-                            <a:srgbClr val="0D1117"/>
-                          </a:solidFill>
-                          <a:latin typeface="Inter"/>
-                        </a:defRPr>
-                      </a:pPr>
-                      <a:r>
-                        <a:rPr>
-                          <a:latin typeface="Inter"/>
-                        </a:rPr>
-                        <a:t>2026-10-01</a:t>
-                      </a:r>
-                    </a:p>
-                  </a:txBody>
-                  <a:tcPr marL="54864" marR="54864" marT="27432" marB="27432" anchor="ctr">
-                    <a:solidFill>
-                      <a:srgbClr val="FFFFFF"/>
-                    </a:solidFill>
-                  </a:tcPr>
-                </a:tc>
-                <a:tc>
-                  <a:txBody>
-                    <a:bodyPr/>
-                    <a:lstStyle/>
-                    <a:p>
-                      <a:pPr>
-                        <a:defRPr sz="650" b="0">
+                        <a:defRPr sz="800" b="0">
                           <a:solidFill>
                             <a:srgbClr val="0D1117"/>
                           </a:solidFill>
@@ -5943,34 +5704,7 @@
                     <a:lstStyle/>
                     <a:p>
                       <a:pPr>
-                        <a:defRPr sz="650" b="0">
-                          <a:solidFill>
-                            <a:srgbClr val="0D1117"/>
-                          </a:solidFill>
-                          <a:latin typeface="Inter"/>
-                        </a:defRPr>
-                      </a:pPr>
-                      <a:r>
-                        <a:rPr>
-                          <a:latin typeface="Inter"/>
-                        </a:rPr>
-                        <a:t>passed</a:t>
-                      </a:r>
-                    </a:p>
-                  </a:txBody>
-                  <a:tcPr marL="54864" marR="54864" marT="27432" marB="27432" anchor="ctr">
-                    <a:solidFill>
-                      <a:srgbClr val="FFFFFF"/>
-                    </a:solidFill>
-                  </a:tcPr>
-                </a:tc>
-                <a:tc>
-                  <a:txBody>
-                    <a:bodyPr/>
-                    <a:lstStyle/>
-                    <a:p>
-                      <a:pPr>
-                        <a:defRPr sz="650" b="0">
+                        <a:defRPr sz="800" b="0">
                           <a:solidFill>
                             <a:srgbClr val="0D1117"/>
                           </a:solidFill>
@@ -5998,14 +5732,56 @@
       </p:graphicFrame>
       <p:sp>
         <p:nvSpPr>
-          <p:cNvPr id="10" name="TextBox 9"/>
+          <p:cNvPr id="11" name="TextBox 10"/>
           <p:cNvSpPr txBox="1"/>
           <p:nvPr/>
         </p:nvSpPr>
         <p:spPr>
           <a:xfrm>
-            <a:off x="640080" y="4497663"/>
-            <a:ext cx="10908792" cy="1720256"/>
+            <a:off x="640080" y="4900622"/>
+            <a:ext cx="10908792" cy="164592"/>
+          </a:xfrm>
+          <a:prstGeom prst="rect">
+            <a:avLst/>
+          </a:prstGeom>
+          <a:noFill/>
+        </p:spPr>
+        <p:txBody>
+          <a:bodyPr wrap="none" lIns="9144" rIns="9144" tIns="9144" bIns="9144" anchor="t">
+            <a:spAutoFit/>
+          </a:bodyPr>
+          <a:lstStyle/>
+          <a:p>
+            <a:pPr algn="l">
+              <a:spcAft>
+                <a:spcPts val="0"/>
+              </a:spcAft>
+              <a:defRPr sz="680" b="0">
+                <a:solidFill>
+                  <a:srgbClr val="8A94A1"/>
+                </a:solidFill>
+                <a:latin typeface="Inter"/>
+              </a:defRPr>
+            </a:pPr>
+            <a:r>
+              <a:rPr>
+                <a:latin typeface="Inter"/>
+              </a:rPr>
+              <a:t>Each digest is the SHA-256 fingerprint of the exact data the report used.</a:t>
+            </a:r>
+          </a:p>
+        </p:txBody>
+      </p:sp>
+      <p:sp>
+        <p:nvSpPr>
+          <p:cNvPr id="12" name="TextBox 11"/>
+          <p:cNvSpPr txBox="1"/>
+          <p:nvPr/>
+        </p:nvSpPr>
+        <p:spPr>
+          <a:xfrm>
+            <a:off x="640080" y="5193230"/>
+            <a:ext cx="10908792" cy="1024689"/>
           </a:xfrm>
           <a:prstGeom prst="rect">
             <a:avLst/>
@@ -6040,7 +5816,7 @@
       </p:sp>
       <p:sp>
         <p:nvSpPr>
-          <p:cNvPr id="11" name="Rectangle 10"/>
+          <p:cNvPr id="13" name="Rectangle 12"/>
           <p:cNvSpPr/>
           <p:nvPr/>
         </p:nvSpPr>
@@ -6089,7 +5865,7 @@
       </p:sp>
       <p:sp>
         <p:nvSpPr>
-          <p:cNvPr id="12" name="TextBox 11"/>
+          <p:cNvPr id="14" name="TextBox 13"/>
           <p:cNvSpPr txBox="1"/>
           <p:nvPr/>
         </p:nvSpPr>
@@ -6131,7 +5907,7 @@
       </p:sp>
       <p:sp>
         <p:nvSpPr>
-          <p:cNvPr id="13" name="TextBox 12"/>
+          <p:cNvPr id="15" name="TextBox 14"/>
           <p:cNvSpPr txBox="1"/>
           <p:nvPr/>
         </p:nvSpPr>
@@ -6173,7 +5949,7 @@
       </p:sp>
       <p:sp>
         <p:nvSpPr>
-          <p:cNvPr id="14" name="TextBox 13"/>
+          <p:cNvPr id="16" name="TextBox 15"/>
           <p:cNvSpPr txBox="1"/>
           <p:nvPr/>
         </p:nvSpPr>
